--- a/knf/decks/d1p3.pptx
+++ b/knf/decks/d1p3.pptx
@@ -5506,7 +5506,7 @@
                 <a:ea typeface="Pretendard"/>
                 <a:cs typeface="Pretendard"/>
               </a:rPr>
-              <a:t>45분 뒤에는</a:t>
+              <a:t>50분 뒤에는</a:t>
             </a:r>
           </a:p>
         </p:txBody>

--- a/knf/decks/d1p3.pptx
+++ b/knf/decks/d1p3.pptx
@@ -3100,7 +3100,7 @@
       <p:grpSpPr/>
       <p:sp>
         <p:nvSpPr>
-          <p:cNvPr id="2" name="Oval 1"/>
+          <p:cNvPr id="2" name="deckgen:decor"/>
           <p:cNvSpPr/>
           <p:nvPr/>
         </p:nvSpPr>
@@ -3130,7 +3130,7 @@
       </p:sp>
       <p:sp>
         <p:nvSpPr>
-          <p:cNvPr id="3" name="Oval 2"/>
+          <p:cNvPr id="3" name="deckgen:decor"/>
           <p:cNvSpPr/>
           <p:nvPr/>
         </p:nvSpPr>
@@ -3160,7 +3160,7 @@
       </p:sp>
       <p:sp>
         <p:nvSpPr>
-          <p:cNvPr id="4" name="Oval 3"/>
+          <p:cNvPr id="4" name="deckgen:decor"/>
           <p:cNvSpPr/>
           <p:nvPr/>
         </p:nvSpPr>
@@ -3190,7 +3190,7 @@
       </p:sp>
       <p:sp>
         <p:nvSpPr>
-          <p:cNvPr id="5" name="Rectangle 4"/>
+          <p:cNvPr id="5" name="deckgen:decor"/>
           <p:cNvSpPr/>
           <p:nvPr/>
         </p:nvSpPr>
@@ -3220,7 +3220,7 @@
       </p:sp>
       <p:sp>
         <p:nvSpPr>
-          <p:cNvPr id="6" name="Oval 5"/>
+          <p:cNvPr id="6" name="deckgen:decor"/>
           <p:cNvSpPr/>
           <p:nvPr/>
         </p:nvSpPr>
@@ -3250,7 +3250,7 @@
       </p:sp>
       <p:sp>
         <p:nvSpPr>
-          <p:cNvPr id="7" name="Oval 6"/>
+          <p:cNvPr id="7" name="deckgen:decor"/>
           <p:cNvSpPr/>
           <p:nvPr/>
         </p:nvSpPr>
@@ -3280,7 +3280,7 @@
       </p:sp>
       <p:sp>
         <p:nvSpPr>
-          <p:cNvPr id="8" name="Oval 7"/>
+          <p:cNvPr id="8" name="deckgen:decor"/>
           <p:cNvSpPr/>
           <p:nvPr/>
         </p:nvSpPr>
@@ -3310,7 +3310,7 @@
       </p:sp>
       <p:sp>
         <p:nvSpPr>
-          <p:cNvPr id="9" name="Oval 8"/>
+          <p:cNvPr id="9" name="deckgen:decor"/>
           <p:cNvSpPr/>
           <p:nvPr/>
         </p:nvSpPr>
@@ -3340,7 +3340,7 @@
       </p:sp>
       <p:sp>
         <p:nvSpPr>
-          <p:cNvPr id="10" name="Rectangle 9"/>
+          <p:cNvPr id="10" name="deckgen:decor"/>
           <p:cNvSpPr/>
           <p:nvPr/>
         </p:nvSpPr>
@@ -3618,7 +3618,7 @@
       <p:grpSpPr/>
       <p:sp>
         <p:nvSpPr>
-          <p:cNvPr id="2" name="Oval 1"/>
+          <p:cNvPr id="2" name="deckgen:decor"/>
           <p:cNvSpPr/>
           <p:nvPr/>
         </p:nvSpPr>
@@ -3648,7 +3648,7 @@
       </p:sp>
       <p:sp>
         <p:nvSpPr>
-          <p:cNvPr id="3" name="Oval 2"/>
+          <p:cNvPr id="3" name="deckgen:decor"/>
           <p:cNvSpPr/>
           <p:nvPr/>
         </p:nvSpPr>
@@ -3678,7 +3678,7 @@
       </p:sp>
       <p:sp>
         <p:nvSpPr>
-          <p:cNvPr id="4" name="Oval 3"/>
+          <p:cNvPr id="4" name="deckgen:decor"/>
           <p:cNvSpPr/>
           <p:nvPr/>
         </p:nvSpPr>
@@ -4534,7 +4534,7 @@
       <p:grpSpPr/>
       <p:sp>
         <p:nvSpPr>
-          <p:cNvPr id="2" name="Oval 1"/>
+          <p:cNvPr id="2" name="deckgen:decor"/>
           <p:cNvSpPr/>
           <p:nvPr/>
         </p:nvSpPr>
@@ -4564,7 +4564,7 @@
       </p:sp>
       <p:sp>
         <p:nvSpPr>
-          <p:cNvPr id="3" name="Oval 2"/>
+          <p:cNvPr id="3" name="deckgen:decor"/>
           <p:cNvSpPr/>
           <p:nvPr/>
         </p:nvSpPr>
@@ -5341,7 +5341,7 @@
       <p:grpSpPr/>
       <p:sp>
         <p:nvSpPr>
-          <p:cNvPr id="2" name="Oval 1"/>
+          <p:cNvPr id="2" name="deckgen:decor"/>
           <p:cNvSpPr/>
           <p:nvPr/>
         </p:nvSpPr>
@@ -5371,7 +5371,7 @@
       </p:sp>
       <p:sp>
         <p:nvSpPr>
-          <p:cNvPr id="3" name="Oval 2"/>
+          <p:cNvPr id="3" name="deckgen:decor"/>
           <p:cNvSpPr/>
           <p:nvPr/>
         </p:nvSpPr>
@@ -5401,7 +5401,7 @@
       </p:sp>
       <p:sp>
         <p:nvSpPr>
-          <p:cNvPr id="4" name="Oval 3"/>
+          <p:cNvPr id="4" name="deckgen:decor"/>
           <p:cNvSpPr/>
           <p:nvPr/>
         </p:nvSpPr>
@@ -6186,7 +6186,7 @@
       <p:grpSpPr/>
       <p:sp>
         <p:nvSpPr>
-          <p:cNvPr id="2" name="Oval 1"/>
+          <p:cNvPr id="2" name="deckgen:decor"/>
           <p:cNvSpPr/>
           <p:nvPr/>
         </p:nvSpPr>
@@ -6216,7 +6216,7 @@
       </p:sp>
       <p:sp>
         <p:nvSpPr>
-          <p:cNvPr id="3" name="Oval 2"/>
+          <p:cNvPr id="3" name="deckgen:decor"/>
           <p:cNvSpPr/>
           <p:nvPr/>
         </p:nvSpPr>
@@ -6246,7 +6246,7 @@
       </p:sp>
       <p:sp>
         <p:nvSpPr>
-          <p:cNvPr id="4" name="Oval 3"/>
+          <p:cNvPr id="4" name="deckgen:decor"/>
           <p:cNvSpPr/>
           <p:nvPr/>
         </p:nvSpPr>
@@ -7678,7 +7678,7 @@
       <p:grpSpPr/>
       <p:sp>
         <p:nvSpPr>
-          <p:cNvPr id="2" name="Oval 1"/>
+          <p:cNvPr id="2" name="deckgen:decor"/>
           <p:cNvSpPr/>
           <p:nvPr/>
         </p:nvSpPr>
@@ -7708,7 +7708,7 @@
       </p:sp>
       <p:sp>
         <p:nvSpPr>
-          <p:cNvPr id="3" name="Oval 2"/>
+          <p:cNvPr id="3" name="deckgen:decor"/>
           <p:cNvSpPr/>
           <p:nvPr/>
         </p:nvSpPr>
@@ -8021,7 +8021,7 @@
       <p:grpSpPr/>
       <p:sp>
         <p:nvSpPr>
-          <p:cNvPr id="2" name="Oval 1"/>
+          <p:cNvPr id="2" name="deckgen:decor"/>
           <p:cNvSpPr/>
           <p:nvPr/>
         </p:nvSpPr>
@@ -8051,7 +8051,7 @@
       </p:sp>
       <p:sp>
         <p:nvSpPr>
-          <p:cNvPr id="3" name="Oval 2"/>
+          <p:cNvPr id="3" name="deckgen:decor"/>
           <p:cNvSpPr/>
           <p:nvPr/>
         </p:nvSpPr>
@@ -8081,7 +8081,7 @@
       </p:sp>
       <p:sp>
         <p:nvSpPr>
-          <p:cNvPr id="4" name="Oval 3"/>
+          <p:cNvPr id="4" name="deckgen:decor"/>
           <p:cNvSpPr/>
           <p:nvPr/>
         </p:nvSpPr>
@@ -10182,7 +10182,7 @@
       <p:grpSpPr/>
       <p:sp>
         <p:nvSpPr>
-          <p:cNvPr id="2" name="Oval 1"/>
+          <p:cNvPr id="2" name="deckgen:decor"/>
           <p:cNvSpPr/>
           <p:nvPr/>
         </p:nvSpPr>
@@ -10212,7 +10212,7 @@
       </p:sp>
       <p:sp>
         <p:nvSpPr>
-          <p:cNvPr id="3" name="Oval 2"/>
+          <p:cNvPr id="3" name="deckgen:decor"/>
           <p:cNvSpPr/>
           <p:nvPr/>
         </p:nvSpPr>
@@ -10242,7 +10242,7 @@
       </p:sp>
       <p:sp>
         <p:nvSpPr>
-          <p:cNvPr id="4" name="Oval 3"/>
+          <p:cNvPr id="4" name="deckgen:decor"/>
           <p:cNvSpPr/>
           <p:nvPr/>
         </p:nvSpPr>
@@ -10448,7 +10448,7 @@
       </p:sp>
       <p:sp>
         <p:nvSpPr>
-          <p:cNvPr id="10" name="TextBox 9"/>
+          <p:cNvPr id="10" name="deckgen:ornament"/>
           <p:cNvSpPr txBox="1"/>
           <p:nvPr/>
         </p:nvSpPr>
@@ -10633,7 +10633,7 @@
       </p:sp>
       <p:sp>
         <p:nvSpPr>
-          <p:cNvPr id="14" name="TextBox 13"/>
+          <p:cNvPr id="14" name="deckgen:ornament"/>
           <p:cNvSpPr txBox="1"/>
           <p:nvPr/>
         </p:nvSpPr>
@@ -10818,7 +10818,7 @@
       </p:sp>
       <p:sp>
         <p:nvSpPr>
-          <p:cNvPr id="18" name="TextBox 17"/>
+          <p:cNvPr id="18" name="deckgen:ornament"/>
           <p:cNvSpPr txBox="1"/>
           <p:nvPr/>
         </p:nvSpPr>
@@ -11140,7 +11140,7 @@
       <p:grpSpPr/>
       <p:sp>
         <p:nvSpPr>
-          <p:cNvPr id="2" name="Oval 1"/>
+          <p:cNvPr id="2" name="deckgen:decor"/>
           <p:cNvSpPr/>
           <p:nvPr/>
         </p:nvSpPr>
@@ -11170,7 +11170,7 @@
       </p:sp>
       <p:sp>
         <p:nvSpPr>
-          <p:cNvPr id="3" name="Oval 2"/>
+          <p:cNvPr id="3" name="deckgen:decor"/>
           <p:cNvSpPr/>
           <p:nvPr/>
         </p:nvSpPr>
@@ -11200,7 +11200,7 @@
       </p:sp>
       <p:sp>
         <p:nvSpPr>
-          <p:cNvPr id="4" name="Oval 3"/>
+          <p:cNvPr id="4" name="deckgen:decor"/>
           <p:cNvSpPr/>
           <p:nvPr/>
         </p:nvSpPr>
@@ -12243,7 +12243,7 @@
       <p:grpSpPr/>
       <p:sp>
         <p:nvSpPr>
-          <p:cNvPr id="2" name="Oval 1"/>
+          <p:cNvPr id="2" name="deckgen:decor"/>
           <p:cNvSpPr/>
           <p:nvPr/>
         </p:nvSpPr>
@@ -12273,7 +12273,7 @@
       </p:sp>
       <p:sp>
         <p:nvSpPr>
-          <p:cNvPr id="3" name="Oval 2"/>
+          <p:cNvPr id="3" name="deckgen:decor"/>
           <p:cNvSpPr/>
           <p:nvPr/>
         </p:nvSpPr>
@@ -12303,7 +12303,7 @@
       </p:sp>
       <p:sp>
         <p:nvSpPr>
-          <p:cNvPr id="4" name="Oval 3"/>
+          <p:cNvPr id="4" name="deckgen:decor"/>
           <p:cNvSpPr/>
           <p:nvPr/>
         </p:nvSpPr>
@@ -13270,7 +13270,7 @@
       <p:grpSpPr/>
       <p:sp>
         <p:nvSpPr>
-          <p:cNvPr id="2" name="Oval 1"/>
+          <p:cNvPr id="2" name="deckgen:decor"/>
           <p:cNvSpPr/>
           <p:nvPr/>
         </p:nvSpPr>
@@ -13300,7 +13300,7 @@
       </p:sp>
       <p:sp>
         <p:nvSpPr>
-          <p:cNvPr id="3" name="Oval 2"/>
+          <p:cNvPr id="3" name="deckgen:decor"/>
           <p:cNvSpPr/>
           <p:nvPr/>
         </p:nvSpPr>
@@ -13330,7 +13330,7 @@
       </p:sp>
       <p:sp>
         <p:nvSpPr>
-          <p:cNvPr id="4" name="Oval 3"/>
+          <p:cNvPr id="4" name="deckgen:decor"/>
           <p:cNvSpPr/>
           <p:nvPr/>
         </p:nvSpPr>
